--- a/Figure3_state_machine.pptx
+++ b/Figure3_state_machine.pptx
@@ -302,7 +302,7 @@
           <a:p>
             <a:fld id="{5BCAD085-E8A6-8845-BD4E-CB4CCA059FC4}" type="datetimeFigureOut">
               <a:rPr lang="en-US" smtClean="0"/>
-              <a:t>8/26/2026</a:t>
+              <a:t>8/27/2026</a:t>
             </a:fld>
             <a:endParaRPr lang="en-US"/>
           </a:p>
@@ -470,7 +470,7 @@
           <a:p>
             <a:fld id="{5BCAD085-E8A6-8845-BD4E-CB4CCA059FC4}" type="datetimeFigureOut">
               <a:rPr lang="en-US" smtClean="0"/>
-              <a:t>8/26/2026</a:t>
+              <a:t>8/27/2026</a:t>
             </a:fld>
             <a:endParaRPr lang="en-US"/>
           </a:p>
@@ -648,7 +648,7 @@
           <a:p>
             <a:fld id="{5BCAD085-E8A6-8845-BD4E-CB4CCA059FC4}" type="datetimeFigureOut">
               <a:rPr lang="en-US" smtClean="0"/>
-              <a:t>8/26/2026</a:t>
+              <a:t>8/27/2026</a:t>
             </a:fld>
             <a:endParaRPr lang="en-US"/>
           </a:p>
@@ -816,7 +816,7 @@
           <a:p>
             <a:fld id="{5BCAD085-E8A6-8845-BD4E-CB4CCA059FC4}" type="datetimeFigureOut">
               <a:rPr lang="en-US" smtClean="0"/>
-              <a:t>8/26/2026</a:t>
+              <a:t>8/27/2026</a:t>
             </a:fld>
             <a:endParaRPr lang="en-US"/>
           </a:p>
@@ -1061,7 +1061,7 @@
           <a:p>
             <a:fld id="{5BCAD085-E8A6-8845-BD4E-CB4CCA059FC4}" type="datetimeFigureOut">
               <a:rPr lang="en-US" smtClean="0"/>
-              <a:t>8/26/2026</a:t>
+              <a:t>8/27/2026</a:t>
             </a:fld>
             <a:endParaRPr lang="en-US"/>
           </a:p>
@@ -1346,7 +1346,7 @@
           <a:p>
             <a:fld id="{5BCAD085-E8A6-8845-BD4E-CB4CCA059FC4}" type="datetimeFigureOut">
               <a:rPr lang="en-US" smtClean="0"/>
-              <a:t>8/26/2026</a:t>
+              <a:t>8/27/2026</a:t>
             </a:fld>
             <a:endParaRPr lang="en-US"/>
           </a:p>
@@ -1765,7 +1765,7 @@
           <a:p>
             <a:fld id="{5BCAD085-E8A6-8845-BD4E-CB4CCA059FC4}" type="datetimeFigureOut">
               <a:rPr lang="en-US" smtClean="0"/>
-              <a:t>8/26/2026</a:t>
+              <a:t>8/27/2026</a:t>
             </a:fld>
             <a:endParaRPr lang="en-US"/>
           </a:p>
@@ -1882,7 +1882,7 @@
           <a:p>
             <a:fld id="{5BCAD085-E8A6-8845-BD4E-CB4CCA059FC4}" type="datetimeFigureOut">
               <a:rPr lang="en-US" smtClean="0"/>
-              <a:t>8/26/2026</a:t>
+              <a:t>8/27/2026</a:t>
             </a:fld>
             <a:endParaRPr lang="en-US"/>
           </a:p>
@@ -1977,7 +1977,7 @@
           <a:p>
             <a:fld id="{5BCAD085-E8A6-8845-BD4E-CB4CCA059FC4}" type="datetimeFigureOut">
               <a:rPr lang="en-US" smtClean="0"/>
-              <a:t>8/26/2026</a:t>
+              <a:t>8/27/2026</a:t>
             </a:fld>
             <a:endParaRPr lang="en-US"/>
           </a:p>
@@ -2252,7 +2252,7 @@
           <a:p>
             <a:fld id="{5BCAD085-E8A6-8845-BD4E-CB4CCA059FC4}" type="datetimeFigureOut">
               <a:rPr lang="en-US" smtClean="0"/>
-              <a:t>8/26/2026</a:t>
+              <a:t>8/27/2026</a:t>
             </a:fld>
             <a:endParaRPr lang="en-US"/>
           </a:p>
@@ -2504,7 +2504,7 @@
           <a:p>
             <a:fld id="{5BCAD085-E8A6-8845-BD4E-CB4CCA059FC4}" type="datetimeFigureOut">
               <a:rPr lang="en-US" smtClean="0"/>
-              <a:t>8/26/2026</a:t>
+              <a:t>8/27/2026</a:t>
             </a:fld>
             <a:endParaRPr lang="en-US"/>
           </a:p>
@@ -2715,7 +2715,7 @@
           <a:p>
             <a:fld id="{5BCAD085-E8A6-8845-BD4E-CB4CCA059FC4}" type="datetimeFigureOut">
               <a:rPr lang="en-US" smtClean="0"/>
-              <a:t>8/26/2026</a:t>
+              <a:t>8/27/2026</a:t>
             </a:fld>
             <a:endParaRPr lang="en-US"/>
           </a:p>
@@ -3192,7 +3192,7 @@
           <a:p>
             <a:pPr algn="ctr"/>
             <a:r>
-              <a:rPr sz="1050" b="1" dirty="0">
+              <a:rPr sz="1100" b="1" dirty="0">
                 <a:solidFill>
                   <a:srgbClr val="1A1A1A"/>
                 </a:solidFill>
@@ -3302,7 +3302,7 @@
           <a:p>
             <a:pPr algn="ctr"/>
             <a:r>
-              <a:rPr sz="1100" b="1">
+              <a:rPr sz="1100" b="1" dirty="0">
                 <a:solidFill>
                   <a:srgbClr val="1A1A1A"/>
                 </a:solidFill>
@@ -3357,7 +3357,7 @@
           <a:p>
             <a:pPr algn="ctr"/>
             <a:r>
-              <a:rPr sz="1050" b="1" dirty="0">
+              <a:rPr sz="1100" b="1" dirty="0">
                 <a:solidFill>
                   <a:srgbClr val="1A1A1A"/>
                 </a:solidFill>
@@ -3412,7 +3412,7 @@
           <a:p>
             <a:pPr algn="ctr"/>
             <a:r>
-              <a:rPr sz="1050" b="1" dirty="0">
+              <a:rPr sz="1100" b="1" dirty="0">
                 <a:solidFill>
                   <a:srgbClr val="1A1A1A"/>
                 </a:solidFill>
@@ -3467,7 +3467,7 @@
           <a:p>
             <a:pPr algn="ctr"/>
             <a:r>
-              <a:rPr sz="1100" b="1">
+              <a:rPr sz="1100" b="1" dirty="0">
                 <a:solidFill>
                   <a:srgbClr val="1A1A1A"/>
                 </a:solidFill>
@@ -4357,7 +4357,7 @@
           <a:p>
             <a:pPr algn="ctr"/>
             <a:r>
-              <a:rPr sz="1200" b="1">
+              <a:rPr sz="1100" b="1">
                 <a:solidFill>
                   <a:srgbClr val="1A1A1A"/>
                 </a:solidFill>
